--- a/decks/englang-p2/englang-p2_ch1_know-the-paper.pptx
+++ b/decks/englang-p2/englang-p2_ch1_know-the-paper.pptx
@@ -126,29 +126,29 @@
   <p:extLst>
     <p:ext uri="{521415D9-36F7-43E2-AB2F-B90AF26B5E84}">
       <p14:sectionLst xmlns:p14="http://schemas.microsoft.com/office/powerpoint/2010/main">
-        <p14:section name="Opening" id="{641c0949-b1db-9f21-324b-536b3aa38cee}">
+        <p14:section name="Opening" id="{04f3d0ec-6099-9fcf-fe91-bafa141a51f2}">
           <p14:sldIdLst>
             <p14:sldId id="256"/>
           </p14:sldIdLst>
         </p14:section>
-        <p14:section name="Gate" id="{44d374f6-57de-f1ac-979a-932cc1db3636}">
+        <p14:section name="Gate" id="{a3b23f85-9db3-35c4-b044-712d02bfa05a}">
           <p14:sldIdLst>
             <p14:sldId id="257"/>
             <p14:sldId id="258"/>
           </p14:sldIdLst>
         </p14:section>
-        <p14:section name="Pre-teach" id="{f799aa9a-7815-ceb9-f040-86374af10382}">
+        <p14:section name="Pre-teach" id="{04c3e535-58e5-7c90-7577-7fcc2e8df8ed}">
           <p14:sldIdLst>
             <p14:sldId id="259"/>
           </p14:sldIdLst>
         </p14:section>
-        <p14:section name="Read-along" id="{4fb85f29-19ab-a4ee-15f2-518861daeaf5}">
+        <p14:section name="Read-along" id="{d45e638b-ce50-0873-b967-4289f32a14ed}">
           <p14:sldIdLst>
             <p14:sldId id="260"/>
             <p14:sldId id="261"/>
           </p14:sldIdLst>
         </p14:section>
-        <p14:section name="Teach" id="{6320361d-99e9-e6c6-f576-83dca0a2bb07}">
+        <p14:section name="Teach" id="{15b93d51-c16b-290b-dbe3-61a91f788613}">
           <p14:sldIdLst>
             <p14:sldId id="262"/>
             <p14:sldId id="263"/>
@@ -158,7 +158,7 @@
             <p14:sldId id="267"/>
           </p14:sldIdLst>
         </p14:section>
-        <p14:section name="Routes" id="{61027563-f8fc-b466-72bb-dc3ab5a40969}">
+        <p14:section name="Routes" id="{59abfd67-fd10-0099-a078-eabd12fea6d6}">
           <p14:sldIdLst>
             <p14:sldId id="268"/>
             <p14:sldId id="269"/>
@@ -166,12 +166,12 @@
             <p14:sldId id="271"/>
           </p14:sldIdLst>
         </p14:section>
-        <p14:section name="Close" id="{7664c8e3-9f8a-31b3-4d05-099d49caa4b0}">
+        <p14:section name="Close" id="{be28b88e-f8e3-e10c-f909-ef96e1421a5d}">
           <p14:sldIdLst>
             <p14:sldId id="272"/>
           </p14:sldIdLst>
         </p14:section>
-        <p14:section name="Answers" id="{c1e47725-1094-6aaa-dc87-2751a06efdca}">
+        <p14:section name="Answers" id="{064c997e-7595-a637-77a2-eece10dc6e33}">
           <p14:sldIdLst>
             <p14:sldId id="273"/>
             <p14:sldId id="274"/>
@@ -1328,7 +1328,7 @@
               <a:rPr lang="en-US" dirty="0"/>
               <a:t>Exit ticket — individual, silent, on a slip or mini-whiteboard. Recall before help: no notes, no lanes, no hints. Collect before pupils leave.
 Question: Source B is a letter from Charlotte to her sister Harriet, written in 1854. Which line describes its form, audience and purpose best?
-Answer: B   A personal letter to one reader, written to entertain and share excitement. A letter to a sister has one reader and a personal register. Charlotte’s purpose is to entertain Harriet and share her delight.
+Answer: A   A personal letter to one reader, written to entertain and share excitement. A letter to a sister has one reader and a personal register. Charlotte’s purpose is to entertain Harriet and share her delight.
 Source of this question: module 3 task ("Form, audience, purpose: Source B") from the manifest.
 Sort the slips: correct → ready to move on; incorrect → start next lesson in the pre-teach group, with the read-along and the Support lane. Same destination next time.</a:t>
             </a:r>
@@ -1602,7 +1602,7 @@
               <a:rPr lang="en-US" dirty="0"/>
               <a:t>Do now — retrieval. Silent, no notes, no help: recall comes before any support. Give about four minutes.
 1. How long is Paper 2, and how many marks is it worth?  →  B   1 hour 45 minutes, 80 marks
-2. Which two kinds of source does Paper 2 give you?  →  B   One nineteenth-century non-fiction text and one modern non-fiction text
+2. Which two kinds of source does Paper 2 give you?  →  A   One nineteenth-century non-fiction text and one modern non-fiction text
 3. Before you read a source, ask about its form, its audience and its ___.  →  purpose
 Circulate: who gets 3/3 (Stretch route), 2/3 (Core), 0–1 (Support)? Use this to route pupils later in the lesson.</a:t>
             </a:r>
@@ -1693,7 +1693,7 @@
             <a:r>
               <a:rPr lang="en-US" dirty="0"/>
               <a:t>Answers — exit ticket: Exit ticket. Reveal the answer; pupils mark their own work in a different colour, then read the "why" together. Same destination for every lane, so one answer serves the whole class.
-Answer: B   A personal letter to one reader, written to entertain and share excitement
+Answer: A   A personal letter to one reader, written to entertain and share excitement
 Why: A letter to a sister has one reader and a personal register. Charlotte’s purpose is to entertain Harriet and share her delight.
 Ask a Support pupil to explain one step, and a Stretch pupil to share their extension.</a:t>
             </a:r>
@@ -1785,7 +1785,7 @@
               <a:rPr lang="en-US" dirty="0"/>
               <a:t>Answers — pupils mark their own in a different colour, then hands up for 3/3, 2/3, 1/3.
 1. B   1 hour 45 minutes, 80 marks. Paper 2 lasts 1 hour 45 minutes and is worth 80 marks: 40 for reading and 40 for writing.
-2. B   One nineteenth-century non-fiction text and one modern non-fiction text. Both sources are non-fiction, linked by topic: one from the nineteenth century and one modern.
+2. A   One nineteenth-century non-fiction text and one modern non-fiction text. Both sources are non-fiction, linked by topic: one from the nineteenth century and one modern.
 3. purpose. Form, audience and purpose are the three questions to ask before you read.
 Say the route each score points to: 3/3 Stretch, 2/3 Core, 0–1 Support. Pupils may choose to move up.</a:t>
             </a:r>
@@ -9605,7 +9605,7 @@
                 <a:ea typeface="Calibri" pitchFamily="34" charset="-122"/>
                 <a:cs typeface="Calibri" pitchFamily="34" charset="-120"/>
               </a:rPr>
-              <a:t>A newspaper report for the general public, written to inform</a:t>
+              <a:t>A personal letter to one reader, written to entertain and share excitement</a:t>
             </a:r>
             <a:endParaRPr lang="en-US" sz="2200" dirty="0"/>
           </a:p>
@@ -9642,7 +9642,7 @@
                 <a:ea typeface="Calibri" pitchFamily="34" charset="-122"/>
                 <a:cs typeface="Calibri" pitchFamily="34" charset="-120"/>
               </a:rPr>
-              <a:t>A personal letter to one reader, written to entertain and share excitement</a:t>
+              <a:t>A newspaper report for the general public, written to inform</a:t>
             </a:r>
             <a:endParaRPr lang="en-US" sz="2200" dirty="0"/>
           </a:p>
@@ -9679,7 +9679,7 @@
                 <a:ea typeface="Calibri" pitchFamily="34" charset="-122"/>
                 <a:cs typeface="Calibri" pitchFamily="34" charset="-120"/>
               </a:rPr>
-              <a:t>A speech to a large audience, written to persuade</a:t>
+              <a:t>A guidebook for tourists, written to advise</a:t>
             </a:r>
             <a:endParaRPr lang="en-US" sz="2200" dirty="0"/>
           </a:p>
@@ -9716,7 +9716,7 @@
                 <a:ea typeface="Calibri" pitchFamily="34" charset="-122"/>
                 <a:cs typeface="Calibri" pitchFamily="34" charset="-120"/>
               </a:rPr>
-              <a:t>A guidebook for tourists, written to advise</a:t>
+              <a:t>A speech to a large audience, written to persuade</a:t>
             </a:r>
             <a:endParaRPr lang="en-US" sz="2200" dirty="0"/>
           </a:p>
@@ -11447,7 +11447,7 @@
                 <a:ea typeface="Calibri" pitchFamily="34" charset="-122"/>
                 <a:cs typeface="Calibri" pitchFamily="34" charset="-120"/>
               </a:rPr>
-              <a:t>1 hour, 60 marks</a:t>
+              <a:t>2 hours, 80 marks</a:t>
             </a:r>
             <a:endParaRPr lang="en-US" sz="2000" dirty="0"/>
           </a:p>
@@ -11521,7 +11521,7 @@
                 <a:ea typeface="Calibri" pitchFamily="34" charset="-122"/>
                 <a:cs typeface="Calibri" pitchFamily="34" charset="-120"/>
               </a:rPr>
-              <a:t>2 hours, 80 marks</a:t>
+              <a:t>1 hour 45 minutes, 100 marks</a:t>
             </a:r>
             <a:endParaRPr lang="en-US" sz="2000" dirty="0"/>
           </a:p>
@@ -11558,7 +11558,7 @@
                 <a:ea typeface="Calibri" pitchFamily="34" charset="-122"/>
                 <a:cs typeface="Calibri" pitchFamily="34" charset="-120"/>
               </a:rPr>
-              <a:t>1 hour 45 minutes, 100 marks</a:t>
+              <a:t>1 hour, 60 marks</a:t>
             </a:r>
             <a:endParaRPr lang="en-US" sz="2000" dirty="0"/>
           </a:p>
@@ -11762,7 +11762,7 @@
                 <a:ea typeface="Calibri" pitchFamily="34" charset="-122"/>
                 <a:cs typeface="Calibri" pitchFamily="34" charset="-120"/>
               </a:rPr>
-              <a:t>Two fiction extracts from the twentieth century</a:t>
+              <a:t>One nineteenth-century non-fiction text and one modern non-fiction text</a:t>
             </a:r>
             <a:endParaRPr lang="en-US" sz="2200" dirty="0"/>
           </a:p>
@@ -11799,7 +11799,7 @@
                 <a:ea typeface="Calibri" pitchFamily="34" charset="-122"/>
                 <a:cs typeface="Calibri" pitchFamily="34" charset="-120"/>
               </a:rPr>
-              <a:t>One nineteenth-century non-fiction text and one modern non-fiction text</a:t>
+              <a:t>One fiction extract and one non-fiction extract</a:t>
             </a:r>
             <a:endParaRPr lang="en-US" sz="2200" dirty="0"/>
           </a:p>
@@ -11836,7 +11836,7 @@
                 <a:ea typeface="Calibri" pitchFamily="34" charset="-122"/>
                 <a:cs typeface="Calibri" pitchFamily="34" charset="-120"/>
               </a:rPr>
-              <a:t>Two poems on the same theme</a:t>
+              <a:t>Two fiction extracts from the twentieth century</a:t>
             </a:r>
             <a:endParaRPr lang="en-US" sz="2200" dirty="0"/>
           </a:p>
@@ -11873,7 +11873,7 @@
                 <a:ea typeface="Calibri" pitchFamily="34" charset="-122"/>
                 <a:cs typeface="Calibri" pitchFamily="34" charset="-120"/>
               </a:rPr>
-              <a:t>One fiction extract and one non-fiction extract</a:t>
+              <a:t>Two poems on the same theme</a:t>
             </a:r>
             <a:endParaRPr lang="en-US" sz="2200" dirty="0"/>
           </a:p>
@@ -12410,7 +12410,7 @@
                 <a:ea typeface="Cambria" pitchFamily="34" charset="-122"/>
                 <a:cs typeface="Cambria" pitchFamily="34" charset="-120"/>
               </a:rPr>
-              <a:t>B   A personal letter to one reader, written to entertain and share excitement</a:t>
+              <a:t>A   A personal letter to one reader, written to entertain and share excitement</a:t>
             </a:r>
             <a:endParaRPr lang="en-US" sz="1800" dirty="0"/>
           </a:p>
@@ -13161,7 +13161,7 @@
                 <a:ea typeface="Calibri" pitchFamily="34" charset="-122"/>
                 <a:cs typeface="Calibri" pitchFamily="34" charset="-120"/>
               </a:rPr>
-              <a:t>B   One nineteenth-century non-fiction text and one modern non-fiction text</a:t>
+              <a:t>A   One nineteenth-century non-fiction text and one modern non-fiction text</a:t>
             </a:r>
             <a:endParaRPr lang="en-US" sz="2200" dirty="0"/>
           </a:p>

--- a/decks/englang-p2/englang-p2_ch1_know-the-paper.pptx
+++ b/decks/englang-p2/englang-p2_ch1_know-the-paper.pptx
@@ -126,29 +126,29 @@
   <p:extLst>
     <p:ext uri="{521415D9-36F7-43E2-AB2F-B90AF26B5E84}">
       <p14:sectionLst xmlns:p14="http://schemas.microsoft.com/office/powerpoint/2010/main">
-        <p14:section name="Opening" id="{04f3d0ec-6099-9fcf-fe91-bafa141a51f2}">
+        <p14:section name="Opening" id="{a2857718-fa5f-e87e-6569-458baa925dbd}">
           <p14:sldIdLst>
             <p14:sldId id="256"/>
           </p14:sldIdLst>
         </p14:section>
-        <p14:section name="Gate" id="{a3b23f85-9db3-35c4-b044-712d02bfa05a}">
+        <p14:section name="Gate" id="{406f9e81-d660-3490-a354-5efcad60cb7d}">
           <p14:sldIdLst>
             <p14:sldId id="257"/>
             <p14:sldId id="258"/>
           </p14:sldIdLst>
         </p14:section>
-        <p14:section name="Pre-teach" id="{04c3e535-58e5-7c90-7577-7fcc2e8df8ed}">
+        <p14:section name="Pre-teach" id="{5192940b-0e2d-8a16-7e31-cdcc20c68708}">
           <p14:sldIdLst>
             <p14:sldId id="259"/>
           </p14:sldIdLst>
         </p14:section>
-        <p14:section name="Read-along" id="{d45e638b-ce50-0873-b967-4289f32a14ed}">
+        <p14:section name="Read-along" id="{65f0bea5-59ce-4b13-17a2-e4e5d510f89b}">
           <p14:sldIdLst>
             <p14:sldId id="260"/>
             <p14:sldId id="261"/>
           </p14:sldIdLst>
         </p14:section>
-        <p14:section name="Teach" id="{15b93d51-c16b-290b-dbe3-61a91f788613}">
+        <p14:section name="Teach" id="{598fef37-d82b-b934-726f-77afd0c33d52}">
           <p14:sldIdLst>
             <p14:sldId id="262"/>
             <p14:sldId id="263"/>
@@ -158,7 +158,7 @@
             <p14:sldId id="267"/>
           </p14:sldIdLst>
         </p14:section>
-        <p14:section name="Routes" id="{59abfd67-fd10-0099-a078-eabd12fea6d6}">
+        <p14:section name="Routes" id="{835609df-a1da-6a1d-f618-56cf2f058f66}">
           <p14:sldIdLst>
             <p14:sldId id="268"/>
             <p14:sldId id="269"/>
@@ -166,12 +166,12 @@
             <p14:sldId id="271"/>
           </p14:sldIdLst>
         </p14:section>
-        <p14:section name="Close" id="{be28b88e-f8e3-e10c-f909-ef96e1421a5d}">
+        <p14:section name="Close" id="{acb73957-aa78-ac07-820b-c7531c5940c0}">
           <p14:sldIdLst>
             <p14:sldId id="272"/>
           </p14:sldIdLst>
         </p14:section>
-        <p14:section name="Answers" id="{064c997e-7595-a637-77a2-eece10dc6e33}">
+        <p14:section name="Answers" id="{c206647b-2ef5-9bfa-fb31-87ae2c1a7372}">
           <p14:sldIdLst>
             <p14:sldId id="273"/>
             <p14:sldId id="274"/>
